--- a/internal_doc/01.需求特性/SequoiaDB_BP(2014_3) .pptx
+++ b/internal_doc/01.需求特性/SequoiaDB_BP(2014_3) .pptx
@@ -2826,7 +2826,15 @@
           <a:p>
             <a:r>
               <a:rPr lang="zh-CN" altLang="en-US" dirty="0" smtClean="0"/>
-              <a:t>设计方案讨论会</a:t>
+              <a:t>遵守</a:t>
+            </a:r>
+            <a:r>
+              <a:rPr lang="en-US" altLang="zh-CN" dirty="0" smtClean="0"/>
+              <a:t>Story</a:t>
+            </a:r>
+            <a:r>
+              <a:rPr lang="zh-CN" altLang="en-US" dirty="0" smtClean="0"/>
+              <a:t>开发流程</a:t>
             </a:r>
             <a:endParaRPr lang="en-US" altLang="zh-CN" dirty="0" smtClean="0"/>
           </a:p>
@@ -2858,7 +2866,19 @@
             </a:r>
             <a:r>
               <a:rPr lang="zh-CN" altLang="en-US" dirty="0" smtClean="0"/>
-              <a:t>模板</a:t>
+              <a:t>模</a:t>
+            </a:r>
+            <a:r>
+              <a:rPr lang="zh-CN" altLang="en-US" dirty="0" smtClean="0"/>
+              <a:t>板</a:t>
+            </a:r>
+            <a:endParaRPr lang="en-US" altLang="zh-CN" dirty="0" smtClean="0"/>
+          </a:p>
+          <a:p>
+            <a:pPr lvl="1"/>
+            <a:r>
+              <a:rPr lang="zh-CN" altLang="en-US" dirty="0" smtClean="0"/>
+              <a:t>测试必须发起测试设计讨论</a:t>
             </a:r>
             <a:endParaRPr lang="en-US" altLang="zh-CN" dirty="0" smtClean="0"/>
           </a:p>
@@ -2949,7 +2969,19 @@
             <a:pPr lvl="1"/>
             <a:r>
               <a:rPr lang="zh-CN" altLang="en-US" dirty="0" smtClean="0"/>
-              <a:t>原则上每月举行一次技术交流会，交流主题由各位发起</a:t>
+              <a:t>原则上每月举行一次技术交流会，交流主题由各位发</a:t>
+            </a:r>
+            <a:r>
+              <a:rPr lang="zh-CN" altLang="en-US" dirty="0" smtClean="0"/>
+              <a:t>起</a:t>
+            </a:r>
+            <a:endParaRPr lang="en-US" altLang="zh-CN" dirty="0" smtClean="0"/>
+          </a:p>
+          <a:p>
+            <a:pPr lvl="1"/>
+            <a:r>
+              <a:rPr lang="zh-CN" altLang="en-US" dirty="0" smtClean="0"/>
+              <a:t>开展培训交流讨论</a:t>
             </a:r>
             <a:endParaRPr lang="en-US" altLang="zh-CN" dirty="0" smtClean="0"/>
           </a:p>
@@ -2978,19 +3010,47 @@
           <a:p>
             <a:r>
               <a:rPr lang="zh-CN" altLang="en-US" dirty="0" smtClean="0"/>
-              <a:t>问题跟踪</a:t>
+              <a:t>质量活动</a:t>
             </a:r>
             <a:endParaRPr lang="en-US" altLang="zh-CN" dirty="0" smtClean="0"/>
           </a:p>
           <a:p>
             <a:pPr lvl="1"/>
+            <a:r>
+              <a:rPr lang="zh-CN" altLang="en-US" dirty="0" smtClean="0"/>
+              <a:t>规范</a:t>
+            </a:r>
             <a:r>
               <a:rPr lang="en-US" altLang="zh-CN" dirty="0" err="1" smtClean="0"/>
               <a:t>Jira</a:t>
             </a:r>
             <a:r>
               <a:rPr lang="zh-CN" altLang="en-US" dirty="0" smtClean="0"/>
-              <a:t>单</a:t>
+              <a:t>单：</a:t>
+            </a:r>
+            <a:r>
+              <a:rPr lang="en-US" altLang="zh-CN" dirty="0" err="1" smtClean="0"/>
+              <a:t>Jira</a:t>
+            </a:r>
+            <a:r>
+              <a:rPr lang="zh-CN" altLang="en-US" dirty="0" smtClean="0"/>
+              <a:t>单中必须说明问题原因，重现条件和提交</a:t>
+            </a:r>
+            <a:r>
+              <a:rPr lang="en-US" altLang="zh-CN" dirty="0" smtClean="0"/>
+              <a:t>SVN</a:t>
+            </a:r>
+            <a:r>
+              <a:rPr lang="zh-CN" altLang="en-US" dirty="0" smtClean="0"/>
+              <a:t>号</a:t>
+            </a:r>
+            <a:endParaRPr lang="en-US" altLang="zh-CN" dirty="0" smtClean="0"/>
+          </a:p>
+          <a:p>
+            <a:pPr lvl="1"/>
+            <a:r>
+              <a:rPr lang="zh-CN" altLang="en-US" dirty="0" smtClean="0"/>
+              <a:t>开展人工场景测试</a:t>
             </a:r>
             <a:endParaRPr lang="en-US" altLang="zh-CN" dirty="0" smtClean="0"/>
           </a:p>
@@ -4844,11 +4904,7 @@
             </a:r>
             <a:r>
               <a:rPr lang="zh-CN" altLang="en-US" dirty="0" smtClean="0"/>
-              <a:t>可维护</a:t>
-            </a:r>
-            <a:r>
-              <a:rPr lang="zh-CN" altLang="en-US" dirty="0" smtClean="0"/>
-              <a:t>性</a:t>
+              <a:t>可维护性</a:t>
             </a:r>
             <a:endParaRPr lang="zh-CN" altLang="en-US" dirty="0"/>
           </a:p>
@@ -7390,11 +7446,7 @@
             </a:r>
             <a:r>
               <a:rPr lang="en-US" altLang="zh-CN" dirty="0" smtClean="0"/>
-              <a:t>—</a:t>
-            </a:r>
-            <a:r>
-              <a:rPr lang="en-US" altLang="zh-CN" dirty="0" smtClean="0"/>
-              <a:t>OM</a:t>
+              <a:t>—OM</a:t>
             </a:r>
             <a:endParaRPr lang="zh-CN" altLang="en-US" dirty="0"/>
           </a:p>
@@ -8862,11 +8914,7 @@
             <a:pPr lvl="1"/>
             <a:r>
               <a:rPr lang="zh-CN" altLang="en-US" dirty="0" smtClean="0"/>
-              <a:t>时间</a:t>
-            </a:r>
-            <a:r>
-              <a:rPr lang="zh-CN" altLang="en-US" dirty="0" smtClean="0"/>
-              <a:t>：</a:t>
+              <a:t>时间：</a:t>
             </a:r>
             <a:r>
               <a:rPr lang="en-US" altLang="zh-CN" dirty="0" smtClean="0"/>
@@ -8882,11 +8930,7 @@
             <a:pPr lvl="1"/>
             <a:r>
               <a:rPr lang="zh-CN" altLang="en-US" dirty="0" smtClean="0"/>
-              <a:t>人天</a:t>
-            </a:r>
-            <a:r>
-              <a:rPr lang="zh-CN" altLang="en-US" dirty="0" smtClean="0"/>
-              <a:t>：</a:t>
+              <a:t>人天：</a:t>
             </a:r>
             <a:r>
               <a:rPr lang="en-US" altLang="zh-CN" dirty="0" smtClean="0"/>
@@ -8894,11 +8938,7 @@
             </a:r>
             <a:r>
               <a:rPr lang="zh-CN" altLang="en-US" dirty="0" smtClean="0"/>
-              <a:t>人</a:t>
-            </a:r>
-            <a:r>
-              <a:rPr lang="zh-CN" altLang="en-US" dirty="0" smtClean="0"/>
-              <a:t>天</a:t>
+              <a:t>人天</a:t>
             </a:r>
             <a:endParaRPr lang="en-US" altLang="zh-CN" dirty="0" smtClean="0"/>
           </a:p>

--- a/internal_doc/01.需求特性/SequoiaDB_BP(2014_3) .pptx
+++ b/internal_doc/01.需求特性/SequoiaDB_BP(2014_3) .pptx
@@ -471,6 +471,88 @@
 </file>
 
 <file path=ppt/notesSlides/notesSlide1.xml><?xml version="1.0" encoding="utf-8"?>
+<p:notes xmlns:a="http://schemas.openxmlformats.org/drawingml/2006/main" xmlns:r="http://schemas.openxmlformats.org/officeDocument/2006/relationships" xmlns:p="http://schemas.openxmlformats.org/presentationml/2006/main">
+  <p:cSld>
+    <p:spTree>
+      <p:nvGrpSpPr>
+        <p:cNvPr id="1" name=""/>
+        <p:cNvGrpSpPr/>
+        <p:nvPr/>
+      </p:nvGrpSpPr>
+      <p:grpSpPr>
+        <a:xfrm>
+          <a:off x="0" y="0"/>
+          <a:ext cx="0" cy="0"/>
+          <a:chOff x="0" y="0"/>
+          <a:chExt cx="0" cy="0"/>
+        </a:xfrm>
+      </p:grpSpPr>
+      <p:sp>
+        <p:nvSpPr>
+          <p:cNvPr id="2" name="Slide Image Placeholder 1"/>
+          <p:cNvSpPr>
+            <a:spLocks noGrp="1" noRot="1" noChangeAspect="1"/>
+          </p:cNvSpPr>
+          <p:nvPr>
+            <p:ph type="sldImg"/>
+          </p:nvPr>
+        </p:nvSpPr>
+        <p:spPr/>
+      </p:sp>
+      <p:sp>
+        <p:nvSpPr>
+          <p:cNvPr id="3" name="Notes Placeholder 2"/>
+          <p:cNvSpPr>
+            <a:spLocks noGrp="1"/>
+          </p:cNvSpPr>
+          <p:nvPr>
+            <p:ph type="body" idx="1"/>
+          </p:nvPr>
+        </p:nvSpPr>
+        <p:spPr/>
+        <p:txBody>
+          <a:bodyPr>
+            <a:normAutofit/>
+          </a:bodyPr>
+          <a:lstStyle/>
+          <a:p>
+            <a:endParaRPr lang="zh-CN" altLang="en-US" dirty="0"/>
+          </a:p>
+        </p:txBody>
+      </p:sp>
+      <p:sp>
+        <p:nvSpPr>
+          <p:cNvPr id="4" name="Slide Number Placeholder 3"/>
+          <p:cNvSpPr>
+            <a:spLocks noGrp="1"/>
+          </p:cNvSpPr>
+          <p:nvPr>
+            <p:ph type="sldNum" sz="quarter" idx="10"/>
+          </p:nvPr>
+        </p:nvSpPr>
+        <p:spPr/>
+        <p:txBody>
+          <a:bodyPr/>
+          <a:lstStyle/>
+          <a:p>
+            <a:fld id="{A495A556-B770-442E-91B6-DBACBAE32CFF}" type="slidenum">
+              <a:rPr lang="zh-CN" altLang="en-US" smtClean="0"/>
+              <a:pPr/>
+              <a:t>2</a:t>
+            </a:fld>
+            <a:endParaRPr lang="zh-CN" altLang="en-US"/>
+          </a:p>
+        </p:txBody>
+      </p:sp>
+    </p:spTree>
+  </p:cSld>
+  <p:clrMapOvr>
+    <a:masterClrMapping/>
+  </p:clrMapOvr>
+</p:notes>
+</file>
+
+<file path=ppt/notesSlides/notesSlide2.xml><?xml version="1.0" encoding="utf-8"?>
 <p:notes xmlns:a="http://schemas.openxmlformats.org/drawingml/2006/main" xmlns:r="http://schemas.openxmlformats.org/officeDocument/2006/relationships" xmlns:p="http://schemas.openxmlformats.org/presentationml/2006/main">
   <p:cSld>
     <p:bg>
@@ -3585,6 +3667,13 @@
   <p:clrMapOvr>
     <a:masterClrMapping/>
   </p:clrMapOvr>
+  <p:timing>
+    <p:tnLst>
+      <p:par>
+        <p:cTn id="1" dur="indefinite" restart="never" nodeType="tmRoot"/>
+      </p:par>
+    </p:tnLst>
+  </p:timing>
 </p:sld>
 </file>
 
